--- a/docs/验收汇报ppt/计组验收.pptx
+++ b/docs/验收汇报ppt/计组验收.pptx
@@ -2406,7 +2406,7 @@
         </p:nvSpPr>
         <p:spPr>
           <a:xfrm>
-            <a:off x="590550" y="4305300"/>
+            <a:off x="664193" y="2741665"/>
             <a:ext cx="2476500" cy="361950"/>
           </a:xfrm>
           <a:prstGeom prst="rect">
@@ -2434,7 +2434,7 @@
               </a:defRPr>
             </a:pPr>
             <a:r>
-              <a:rPr sz="1500" b="1">
+              <a:rPr sz="1500" b="1" dirty="0" err="1">
                 <a:solidFill>
                   <a:srgbClr val="25D4E8"/>
                 </a:solidFill>
@@ -2444,27 +2444,35 @@
               </a:rPr>
               <a:t>验收汇报</a:t>
             </a:r>
-          </a:p>
-        </p:txBody>
-      </p:sp>
-      <p:sp>
-        <p:nvSpPr>
-          <p:cNvPr id="5" name="矩形 4">
-            <a:extLst>
-              <a:ext uri="{FF2B5EF4-FFF2-40B4-BE49-F238E27FC236}">
-                <a16:creationId xmlns:a16="http://schemas.microsoft.com/office/drawing/2014/main" id="{CA5B9071-818D-4C04-8DC1-336A645CD0E0}"/>
-              </a:ext>
-            </a:extLst>
-          </p:cNvPr>
-          <p:cNvSpPr>
-            <a:spLocks noGrp="1"/>
-          </p:cNvSpPr>
-          <p:nvPr/>
-        </p:nvSpPr>
-        <p:spPr>
-          <a:xfrm>
-            <a:off x="590550" y="4857750"/>
-            <a:ext cx="8477250" cy="400050"/>
+            <a:endParaRPr sz="1500" b="1" dirty="0">
+              <a:solidFill>
+                <a:srgbClr val="25D4E8"/>
+              </a:solidFill>
+              <a:latin typeface="Noto Sans SC"/>
+              <a:ea typeface="Noto Sans SC"/>
+              <a:cs typeface="Noto Sans SC"/>
+            </a:endParaRPr>
+          </a:p>
+        </p:txBody>
+      </p:sp>
+      <p:sp>
+        <p:nvSpPr>
+          <p:cNvPr id="12" name="矩形 11">
+            <a:extLst>
+              <a:ext uri="{FF2B5EF4-FFF2-40B4-BE49-F238E27FC236}">
+                <a16:creationId xmlns:a16="http://schemas.microsoft.com/office/drawing/2014/main" id="{77A9C158-0293-4602-B0AB-B06C609E5D40}"/>
+              </a:ext>
+            </a:extLst>
+          </p:cNvPr>
+          <p:cNvSpPr>
+            <a:spLocks noGrp="1"/>
+          </p:cNvSpPr>
+          <p:nvPr/>
+        </p:nvSpPr>
+        <p:spPr>
+          <a:xfrm>
+            <a:off x="590550" y="4173486"/>
+            <a:ext cx="8096250" cy="228600"/>
           </a:xfrm>
           <a:prstGeom prst="rect">
             <a:avLst/>
@@ -2476,338 +2484,11 @@
         </p:spPr>
         <p:txBody>
           <a:bodyPr anchor="t">
-            <a:normAutofit/>
+            <a:noAutofit/>
           </a:bodyPr>
           <a:lstStyle/>
           <a:p>
             <a:pPr>
-              <a:defRPr sz="1650" b="0">
-                <a:solidFill>
-                  <a:srgbClr val="EAF2FF"/>
-                </a:solidFill>
-                <a:latin typeface="Noto Sans SC"/>
-                <a:ea typeface="Noto Sans SC"/>
-                <a:cs typeface="Noto Sans SC"/>
-              </a:defRPr>
-            </a:pPr>
-            <a:r>
-              <a:rPr sz="1650" b="0">
-                <a:solidFill>
-                  <a:srgbClr val="EAF2FF"/>
-                </a:solidFill>
-                <a:latin typeface="Noto Sans SC"/>
-                <a:ea typeface="Noto Sans SC"/>
-                <a:cs typeface="Noto Sans SC"/>
-              </a:rPr>
-              <a:t>从五级流水 CPU 到俄罗斯方块整机下板</a:t>
-            </a:r>
-          </a:p>
-        </p:txBody>
-      </p:sp>
-      <p:sp>
-        <p:nvSpPr>
-          <p:cNvPr id="6" name="矩形: 圆角 5">
-            <a:extLst>
-              <a:ext uri="{FF2B5EF4-FFF2-40B4-BE49-F238E27FC236}">
-                <a16:creationId xmlns:a16="http://schemas.microsoft.com/office/drawing/2014/main" id="{B3A08E0A-F2BB-45FF-BEB6-7ADED769417D}"/>
-              </a:ext>
-            </a:extLst>
-          </p:cNvPr>
-          <p:cNvSpPr>
-            <a:spLocks noGrp="1"/>
-          </p:cNvSpPr>
-          <p:nvPr/>
-        </p:nvSpPr>
-        <p:spPr>
-          <a:xfrm>
-            <a:off x="590550" y="5657850"/>
-            <a:ext cx="1314450" cy="304800"/>
-          </a:xfrm>
-          <a:prstGeom prst="roundRect">
-            <a:avLst>
-              <a:gd name="adj" fmla="val 50000"/>
-            </a:avLst>
-          </a:prstGeom>
-          <a:solidFill>
-            <a:srgbClr val="16243B"/>
-          </a:solidFill>
-          <a:ln w="0">
-            <a:noFill/>
-            <a:prstDash val="solid"/>
-          </a:ln>
-        </p:spPr>
-      </p:sp>
-      <p:sp>
-        <p:nvSpPr>
-          <p:cNvPr id="7" name="矩形 6">
-            <a:extLst>
-              <a:ext uri="{FF2B5EF4-FFF2-40B4-BE49-F238E27FC236}">
-                <a16:creationId xmlns:a16="http://schemas.microsoft.com/office/drawing/2014/main" id="{D09CEE21-30D0-476B-B563-9C360D056C7C}"/>
-              </a:ext>
-            </a:extLst>
-          </p:cNvPr>
-          <p:cNvSpPr>
-            <a:spLocks noGrp="1"/>
-          </p:cNvSpPr>
-          <p:nvPr/>
-        </p:nvSpPr>
-        <p:spPr>
-          <a:xfrm>
-            <a:off x="590550" y="5705475"/>
-            <a:ext cx="1314450" cy="200025"/>
-          </a:xfrm>
-          <a:prstGeom prst="rect">
-            <a:avLst/>
-          </a:prstGeom>
-          <a:noFill/>
-          <a:ln w="0">
-            <a:noFill/>
-          </a:ln>
-        </p:spPr>
-        <p:txBody>
-          <a:bodyPr anchor="ctr">
-            <a:normAutofit fontScale="80577" lnSpcReduction="10000"/>
-          </a:bodyPr>
-          <a:lstStyle/>
-          <a:p>
-            <a:pPr>
-              <a:defRPr sz="975" b="1">
-                <a:solidFill>
-                  <a:srgbClr val="37D99A"/>
-                </a:solidFill>
-                <a:latin typeface="Noto Sans SC"/>
-                <a:ea typeface="Noto Sans SC"/>
-                <a:cs typeface="Noto Sans SC"/>
-              </a:defRPr>
-            </a:pPr>
-            <a:r>
-              <a:rPr sz="975" b="1">
-                <a:solidFill>
-                  <a:srgbClr val="37D99A"/>
-                </a:solidFill>
-                <a:latin typeface="Noto Sans SC"/>
-                <a:ea typeface="Noto Sans SC"/>
-                <a:cs typeface="Noto Sans SC"/>
-              </a:rPr>
-              <a:t>13 组回归</a:t>
-            </a:r>
-          </a:p>
-        </p:txBody>
-      </p:sp>
-      <p:sp>
-        <p:nvSpPr>
-          <p:cNvPr id="8" name="矩形: 圆角 7">
-            <a:extLst>
-              <a:ext uri="{FF2B5EF4-FFF2-40B4-BE49-F238E27FC236}">
-                <a16:creationId xmlns:a16="http://schemas.microsoft.com/office/drawing/2014/main" id="{2355F491-6206-4618-9D80-2560AFE8CA51}"/>
-              </a:ext>
-            </a:extLst>
-          </p:cNvPr>
-          <p:cNvSpPr>
-            <a:spLocks noGrp="1"/>
-          </p:cNvSpPr>
-          <p:nvPr/>
-        </p:nvSpPr>
-        <p:spPr>
-          <a:xfrm>
-            <a:off x="2057400" y="5657850"/>
-            <a:ext cx="1428750" cy="304800"/>
-          </a:xfrm>
-          <a:prstGeom prst="roundRect">
-            <a:avLst>
-              <a:gd name="adj" fmla="val 50000"/>
-            </a:avLst>
-          </a:prstGeom>
-          <a:solidFill>
-            <a:srgbClr val="16243B"/>
-          </a:solidFill>
-          <a:ln w="0">
-            <a:noFill/>
-            <a:prstDash val="solid"/>
-          </a:ln>
-        </p:spPr>
-      </p:sp>
-      <p:sp>
-        <p:nvSpPr>
-          <p:cNvPr id="9" name="矩形 8">
-            <a:extLst>
-              <a:ext uri="{FF2B5EF4-FFF2-40B4-BE49-F238E27FC236}">
-                <a16:creationId xmlns:a16="http://schemas.microsoft.com/office/drawing/2014/main" id="{D70EF771-665E-4206-807D-666138BDB7B3}"/>
-              </a:ext>
-            </a:extLst>
-          </p:cNvPr>
-          <p:cNvSpPr>
-            <a:spLocks noGrp="1"/>
-          </p:cNvSpPr>
-          <p:nvPr/>
-        </p:nvSpPr>
-        <p:spPr>
-          <a:xfrm>
-            <a:off x="2057400" y="5705475"/>
-            <a:ext cx="1428750" cy="200025"/>
-          </a:xfrm>
-          <a:prstGeom prst="rect">
-            <a:avLst/>
-          </a:prstGeom>
-          <a:noFill/>
-          <a:ln w="0">
-            <a:noFill/>
-          </a:ln>
-        </p:spPr>
-        <p:txBody>
-          <a:bodyPr anchor="ctr">
-            <a:normAutofit fontScale="80577" lnSpcReduction="10000"/>
-          </a:bodyPr>
-          <a:lstStyle/>
-          <a:p>
-            <a:pPr>
-              <a:defRPr sz="975" b="1">
-                <a:solidFill>
-                  <a:srgbClr val="25D4E8"/>
-                </a:solidFill>
-                <a:latin typeface="Noto Sans SC"/>
-                <a:ea typeface="Noto Sans SC"/>
-                <a:cs typeface="Noto Sans SC"/>
-              </a:defRPr>
-            </a:pPr>
-            <a:r>
-              <a:rPr sz="975" b="1">
-                <a:solidFill>
-                  <a:srgbClr val="25D4E8"/>
-                </a:solidFill>
-                <a:latin typeface="Noto Sans SC"/>
-                <a:ea typeface="Noto Sans SC"/>
-                <a:cs typeface="Noto Sans SC"/>
-              </a:rPr>
-              <a:t>90.91 MHz</a:t>
-            </a:r>
-          </a:p>
-        </p:txBody>
-      </p:sp>
-      <p:sp>
-        <p:nvSpPr>
-          <p:cNvPr id="10" name="矩形: 圆角 9">
-            <a:extLst>
-              <a:ext uri="{FF2B5EF4-FFF2-40B4-BE49-F238E27FC236}">
-                <a16:creationId xmlns:a16="http://schemas.microsoft.com/office/drawing/2014/main" id="{B794B8C7-98A3-4F02-B79A-200197263841}"/>
-              </a:ext>
-            </a:extLst>
-          </p:cNvPr>
-          <p:cNvSpPr>
-            <a:spLocks noGrp="1"/>
-          </p:cNvSpPr>
-          <p:nvPr/>
-        </p:nvSpPr>
-        <p:spPr>
-          <a:xfrm>
-            <a:off x="3638550" y="5657850"/>
-            <a:ext cx="1238250" cy="304800"/>
-          </a:xfrm>
-          <a:prstGeom prst="roundRect">
-            <a:avLst>
-              <a:gd name="adj" fmla="val 50000"/>
-            </a:avLst>
-          </a:prstGeom>
-          <a:solidFill>
-            <a:srgbClr val="16243B"/>
-          </a:solidFill>
-          <a:ln w="0">
-            <a:noFill/>
-            <a:prstDash val="solid"/>
-          </a:ln>
-        </p:spPr>
-      </p:sp>
-      <p:sp>
-        <p:nvSpPr>
-          <p:cNvPr id="11" name="矩形 10">
-            <a:extLst>
-              <a:ext uri="{FF2B5EF4-FFF2-40B4-BE49-F238E27FC236}">
-                <a16:creationId xmlns:a16="http://schemas.microsoft.com/office/drawing/2014/main" id="{88E4A285-E6BF-407F-A220-BFBB5F99A1E1}"/>
-              </a:ext>
-            </a:extLst>
-          </p:cNvPr>
-          <p:cNvSpPr>
-            <a:spLocks noGrp="1"/>
-          </p:cNvSpPr>
-          <p:nvPr/>
-        </p:nvSpPr>
-        <p:spPr>
-          <a:xfrm>
-            <a:off x="3638550" y="5705475"/>
-            <a:ext cx="1238250" cy="200025"/>
-          </a:xfrm>
-          <a:prstGeom prst="rect">
-            <a:avLst/>
-          </a:prstGeom>
-          <a:noFill/>
-          <a:ln w="0">
-            <a:noFill/>
-          </a:ln>
-        </p:spPr>
-        <p:txBody>
-          <a:bodyPr anchor="ctr">
-            <a:normAutofit fontScale="80577" lnSpcReduction="10000"/>
-          </a:bodyPr>
-          <a:lstStyle/>
-          <a:p>
-            <a:pPr>
-              <a:defRPr sz="975" b="1">
-                <a:solidFill>
-                  <a:srgbClr val="F5B942"/>
-                </a:solidFill>
-                <a:latin typeface="Noto Sans SC"/>
-                <a:ea typeface="Noto Sans SC"/>
-                <a:cs typeface="Noto Sans SC"/>
-              </a:defRPr>
-            </a:pPr>
-            <a:r>
-              <a:rPr sz="975" b="1">
-                <a:solidFill>
-                  <a:srgbClr val="F5B942"/>
-                </a:solidFill>
-                <a:latin typeface="Noto Sans SC"/>
-                <a:ea typeface="Noto Sans SC"/>
-                <a:cs typeface="Noto Sans SC"/>
-              </a:rPr>
-              <a:t>EES-338</a:t>
-            </a:r>
-          </a:p>
-        </p:txBody>
-      </p:sp>
-      <p:sp>
-        <p:nvSpPr>
-          <p:cNvPr id="12" name="矩形 11">
-            <a:extLst>
-              <a:ext uri="{FF2B5EF4-FFF2-40B4-BE49-F238E27FC236}">
-                <a16:creationId xmlns:a16="http://schemas.microsoft.com/office/drawing/2014/main" id="{77A9C158-0293-4602-B0AB-B06C609E5D40}"/>
-              </a:ext>
-            </a:extLst>
-          </p:cNvPr>
-          <p:cNvSpPr>
-            <a:spLocks noGrp="1"/>
-          </p:cNvSpPr>
-          <p:nvPr/>
-        </p:nvSpPr>
-        <p:spPr>
-          <a:xfrm>
-            <a:off x="590550" y="6172200"/>
-            <a:ext cx="8096250" cy="228600"/>
-          </a:xfrm>
-          <a:prstGeom prst="rect">
-            <a:avLst/>
-          </a:prstGeom>
-          <a:noFill/>
-          <a:ln w="0">
-            <a:noFill/>
-          </a:ln>
-        </p:spPr>
-        <p:txBody>
-          <a:bodyPr anchor="t">
-            <a:normAutofit fontScale="93214" lnSpcReduction="10000"/>
-          </a:bodyPr>
-          <a:lstStyle/>
-          <a:p>
-            <a:pPr>
               <a:defRPr sz="1050" b="0">
                 <a:solidFill>
                   <a:srgbClr val="A6B4C8"/>
@@ -2818,7 +2499,7 @@
               </a:defRPr>
             </a:pPr>
             <a:r>
-              <a:rPr sz="1050" b="0">
+              <a:rPr sz="2000" b="0" dirty="0" err="1">
                 <a:solidFill>
                   <a:srgbClr val="A6B4C8"/>
                 </a:solidFill>
@@ -2826,8 +2507,16 @@
                 <a:ea typeface="Noto Sans SC"/>
                 <a:cs typeface="Noto Sans SC"/>
               </a:rPr>
-              <a:t>成员：王建乐、张晓行、钱博傲    日期：2026 年 9 月</a:t>
-            </a:r>
+              <a:t>成员：王建乐、张晓行、钱博傲</a:t>
+            </a:r>
+            <a:endParaRPr sz="2000" b="0" dirty="0">
+              <a:solidFill>
+                <a:srgbClr val="A6B4C8"/>
+              </a:solidFill>
+              <a:latin typeface="Noto Sans SC"/>
+              <a:ea typeface="Noto Sans SC"/>
+              <a:cs typeface="Noto Sans SC"/>
+            </a:endParaRPr>
           </a:p>
         </p:txBody>
       </p:sp>
@@ -7282,63 +6971,6 @@
       </p:sp>
       <p:sp>
         <p:nvSpPr>
-          <p:cNvPr id="14" name="矩形 13">
-            <a:extLst>
-              <a:ext uri="{FF2B5EF4-FFF2-40B4-BE49-F238E27FC236}">
-                <a16:creationId xmlns:a16="http://schemas.microsoft.com/office/drawing/2014/main" id="{B5E0E5F4-9EB7-4588-9B44-91E1D1BA86CA}"/>
-              </a:ext>
-            </a:extLst>
-          </p:cNvPr>
-          <p:cNvSpPr>
-            <a:spLocks noGrp="1"/>
-          </p:cNvSpPr>
-          <p:nvPr/>
-        </p:nvSpPr>
-        <p:spPr>
-          <a:xfrm>
-            <a:off x="400050" y="5676900"/>
-            <a:ext cx="11391900" cy="285750"/>
-          </a:xfrm>
-          <a:prstGeom prst="rect">
-            <a:avLst/>
-          </a:prstGeom>
-          <a:noFill/>
-          <a:ln w="0">
-            <a:noFill/>
-          </a:ln>
-        </p:spPr>
-        <p:txBody>
-          <a:bodyPr anchor="t">
-            <a:normAutofit/>
-          </a:bodyPr>
-          <a:lstStyle/>
-          <a:p>
-            <a:pPr>
-              <a:defRPr sz="1275" b="1">
-                <a:solidFill>
-                  <a:srgbClr val="37D99A"/>
-                </a:solidFill>
-                <a:latin typeface="Noto Sans SC"/>
-                <a:ea typeface="Noto Sans SC"/>
-                <a:cs typeface="Noto Sans SC"/>
-              </a:defRPr>
-            </a:pPr>
-            <a:r>
-              <a:rPr sz="1275" b="1">
-                <a:solidFill>
-                  <a:srgbClr val="37D99A"/>
-                </a:solidFill>
-                <a:latin typeface="Noto Sans SC"/>
-                <a:ea typeface="Noto Sans SC"/>
-                <a:cs typeface="Noto Sans SC"/>
-              </a:rPr>
-              <a:t>视频证据：docs/下板演示_俄罗斯方块.mp4，约 56 秒</a:t>
-            </a:r>
-          </a:p>
-        </p:txBody>
-      </p:sp>
-      <p:sp>
-        <p:nvSpPr>
           <p:cNvPr id="15" name="矩形 14">
             <a:extLst>
               <a:ext uri="{FF2B5EF4-FFF2-40B4-BE49-F238E27FC236}">
@@ -7353,7 +6985,7 @@
         </p:nvSpPr>
         <p:spPr>
           <a:xfrm>
-            <a:off x="400050" y="6057900"/>
+            <a:off x="400050" y="5696078"/>
             <a:ext cx="11391900" cy="266700"/>
           </a:xfrm>
           <a:prstGeom prst="rect">
@@ -11277,63 +10909,6 @@
       </p:sp>
       <p:sp>
         <p:nvSpPr>
-          <p:cNvPr id="40" name="矩形 39">
-            <a:extLst>
-              <a:ext uri="{FF2B5EF4-FFF2-40B4-BE49-F238E27FC236}">
-                <a16:creationId xmlns:a16="http://schemas.microsoft.com/office/drawing/2014/main" id="{CA413FF5-AEDA-47F8-A37A-1325D884F14C}"/>
-              </a:ext>
-            </a:extLst>
-          </p:cNvPr>
-          <p:cNvSpPr>
-            <a:spLocks noGrp="1"/>
-          </p:cNvSpPr>
-          <p:nvPr/>
-        </p:nvSpPr>
-        <p:spPr>
-          <a:xfrm>
-            <a:off x="400050" y="5572125"/>
-            <a:ext cx="11391900" cy="266700"/>
-          </a:xfrm>
-          <a:prstGeom prst="rect">
-            <a:avLst/>
-          </a:prstGeom>
-          <a:noFill/>
-          <a:ln w="0">
-            <a:noFill/>
-          </a:ln>
-        </p:spPr>
-        <p:txBody>
-          <a:bodyPr anchor="t">
-            <a:normAutofit fontScale="97696" lnSpcReduction="10000"/>
-          </a:bodyPr>
-          <a:lstStyle/>
-          <a:p>
-            <a:pPr>
-              <a:defRPr sz="1275" b="0">
-                <a:solidFill>
-                  <a:srgbClr val="A6B4C8"/>
-                </a:solidFill>
-                <a:latin typeface="Noto Sans SC"/>
-                <a:ea typeface="Noto Sans SC"/>
-                <a:cs typeface="Noto Sans SC"/>
-              </a:defRPr>
-            </a:pPr>
-            <a:r>
-              <a:rPr sz="1275" b="0">
-                <a:solidFill>
-                  <a:srgbClr val="A6B4C8"/>
-                </a:solidFill>
-                <a:latin typeface="Noto Sans SC"/>
-                <a:ea typeface="Noto Sans SC"/>
-                <a:cs typeface="Noto Sans SC"/>
-              </a:rPr>
-              <a:t>俄罗斯方块把 CPU 核心、存储系统和外设接口连接成可观察的应用闭环</a:t>
-            </a:r>
-          </a:p>
-        </p:txBody>
-      </p:sp>
-      <p:sp>
-        <p:nvSpPr>
           <p:cNvPr id="41" name="矩形 40">
             <a:extLst>
               <a:ext uri="{FF2B5EF4-FFF2-40B4-BE49-F238E27FC236}">
@@ -18231,7 +17806,7 @@
         </p:nvGraphicFramePr>
         <p:xfrm>
           <a:off x="400050" y="1600200"/>
-          <a:ext cx="11391900" cy="3714750"/>
+          <a:ext cx="11391900" cy="3714753"/>
         </p:xfrm>
         <a:graphic>
           <a:graphicData uri="http://schemas.openxmlformats.org/drawingml/2006/table">
